--- a/tests/fixtures/slides-roundtrip/slides-saved-roundtrip.pptx
+++ b/tests/fixtures/slides-roundtrip/slides-saved-roundtrip.pptx
@@ -367,7 +367,7 @@
             <a:pPr indent="0" algn="r">
               <a:buNone/>
             </a:pPr>
-            <a:fld id="{1351504B-6D9C-4B67-A9EC-02E915FF4159}" type="slidenum">
+            <a:fld id="{6D3C8C20-624C-4ADF-A4ED-DF4E07E370F0}" type="slidenum">
               <a:rPr lang="en-GB" sz="1400" b="0" u="none" strike="noStrike">
                 <a:solidFill>
                   <a:srgbClr val="000000"/>
@@ -746,7 +746,7 @@
         <p:txBody>
           <a:bodyPr/>
           <a:p>
-            <a:fld id="{BCD445C0-70BD-4D34-8BF8-7820251CC60B}" type="slidenum">
+            <a:fld id="{0C93E831-46DC-4FBB-B02B-4046C5C11E38}" type="slidenum">
               <a:t>&lt;#&gt;</a:t>
             </a:fld>
           </a:p>
@@ -829,7 +829,7 @@
         <p:txBody>
           <a:bodyPr/>
           <a:p>
-            <a:fld id="{F8B3D1F3-C047-463E-89A7-14E268F0B379}" type="slidenum">
+            <a:fld id="{CC29C408-B121-4E0F-B11E-8B3F3309D378}" type="slidenum">
               <a:t>&lt;#&gt;</a:t>
             </a:fld>
           </a:p>
@@ -1508,7 +1508,7 @@
             <a:pPr indent="0" algn="r">
               <a:buNone/>
             </a:pPr>
-            <a:fld id="{50BF36C8-09BD-4533-A950-1235BA53BAED}" type="slidenum">
+            <a:fld id="{245238A2-1BD8-4111-8861-CC30286AE575}" type="slidenum">
               <a:rPr lang="en-GB" sz="1400" b="0" u="none" strike="noStrike">
                 <a:solidFill>
                   <a:srgbClr val="000000"/>
